--- a/Tutorium Mathe/Tutorium7_Slides.pptx
+++ b/Tutorium Mathe/Tutorium7_Slides.pptx
@@ -224,7 +224,7 @@
           <a:p>
             <a:fld id="{B535FBCA-7827-204B-8916-3BD441F72BB8}" type="datetimeFigureOut">
               <a:rPr lang="de-DE" smtClean="0"/>
-              <a:t>07.01.25</a:t>
+              <a:t>09.01.25</a:t>
             </a:fld>
             <a:endParaRPr lang="de-DE"/>
           </a:p>
@@ -417,7 +417,7 @@
           <a:p>
             <a:fld id="{842CE5A1-857B-214D-8BEE-AF65CEFCD544}" type="datetimeFigureOut">
               <a:rPr lang="de-DE" smtClean="0"/>
-              <a:t>07.01.25</a:t>
+              <a:t>09.01.25</a:t>
             </a:fld>
             <a:endParaRPr lang="de-DE"/>
           </a:p>
@@ -4258,8 +4258,8 @@
           <a:chExt cx="0" cy="0"/>
         </a:xfrm>
       </p:grpSpPr>
-      <mc:AlternateContent xmlns:mc="http://schemas.openxmlformats.org/markup-compatibility/2006">
-        <mc:Choice xmlns:a14="http://schemas.microsoft.com/office/drawing/2010/main" Requires="a14">
+      <mc:AlternateContent xmlns:mc="http://schemas.openxmlformats.org/markup-compatibility/2006" xmlns:a14="http://schemas.microsoft.com/office/drawing/2010/main">
+        <mc:Choice Requires="a14">
           <p:sp>
             <p:nvSpPr>
               <p:cNvPr id="2" name="Inhaltsplatzhalter 1">
@@ -4786,7 +4786,7 @@
             </p:txBody>
           </p:sp>
         </mc:Choice>
-        <mc:Fallback>
+        <mc:Fallback xmlns="">
           <p:sp>
             <p:nvSpPr>
               <p:cNvPr id="2" name="Inhaltsplatzhalter 1">
@@ -5064,8 +5064,8 @@
           <a:chExt cx="0" cy="0"/>
         </a:xfrm>
       </p:grpSpPr>
-      <mc:AlternateContent xmlns:mc="http://schemas.openxmlformats.org/markup-compatibility/2006">
-        <mc:Choice xmlns:a14="http://schemas.microsoft.com/office/drawing/2010/main" Requires="a14">
+      <mc:AlternateContent xmlns:mc="http://schemas.openxmlformats.org/markup-compatibility/2006" xmlns:a14="http://schemas.microsoft.com/office/drawing/2010/main">
+        <mc:Choice Requires="a14">
           <p:sp>
             <p:nvSpPr>
               <p:cNvPr id="2" name="Inhaltsplatzhalter 1">
@@ -5386,7 +5386,7 @@
             </p:txBody>
           </p:sp>
         </mc:Choice>
-        <mc:Fallback>
+        <mc:Fallback xmlns="">
           <p:sp>
             <p:nvSpPr>
               <p:cNvPr id="2" name="Inhaltsplatzhalter 1">
@@ -5559,8 +5559,8 @@
           <a:chExt cx="0" cy="0"/>
         </a:xfrm>
       </p:grpSpPr>
-      <mc:AlternateContent xmlns:mc="http://schemas.openxmlformats.org/markup-compatibility/2006">
-        <mc:Choice xmlns:a14="http://schemas.microsoft.com/office/drawing/2010/main" Requires="a14">
+      <mc:AlternateContent xmlns:mc="http://schemas.openxmlformats.org/markup-compatibility/2006" xmlns:a14="http://schemas.microsoft.com/office/drawing/2010/main">
+        <mc:Choice Requires="a14">
           <p:sp>
             <p:nvSpPr>
               <p:cNvPr id="2" name="Inhaltsplatzhalter 1">
@@ -5881,7 +5881,7 @@
             </p:txBody>
           </p:sp>
         </mc:Choice>
-        <mc:Fallback>
+        <mc:Fallback xmlns="">
           <p:sp>
             <p:nvSpPr>
               <p:cNvPr id="2" name="Inhaltsplatzhalter 1">
@@ -6122,8 +6122,8 @@
           <a:chExt cx="0" cy="0"/>
         </a:xfrm>
       </p:grpSpPr>
-      <mc:AlternateContent xmlns:mc="http://schemas.openxmlformats.org/markup-compatibility/2006">
-        <mc:Choice xmlns:a14="http://schemas.microsoft.com/office/drawing/2010/main" Requires="a14">
+      <mc:AlternateContent xmlns:mc="http://schemas.openxmlformats.org/markup-compatibility/2006" xmlns:a14="http://schemas.microsoft.com/office/drawing/2010/main">
+        <mc:Choice Requires="a14">
           <p:sp>
             <p:nvSpPr>
               <p:cNvPr id="2" name="Inhaltsplatzhalter 1">
@@ -6486,7 +6486,7 @@
             </p:txBody>
           </p:sp>
         </mc:Choice>
-        <mc:Fallback>
+        <mc:Fallback xmlns="">
           <p:sp>
             <p:nvSpPr>
               <p:cNvPr id="2" name="Inhaltsplatzhalter 1">
